--- a/clientes/flavia-muccelin/Cultura-de-Marca-My-Home.pptx
+++ b/clientes/flavia-muccelin/Cultura-de-Marca-My-Home.pptx
@@ -5766,7 +5766,7 @@
                 </a:solidFill>
                 <a:latin typeface="Outfit 1 Light"/>
               </a:rPr>
-              <a:t>O que o mercado reconhece e o que precisamos construir.</a:t>
+              <a:t>O que o mercado reconhece e o que precisa ser construído.</a:t>
             </a:r>
           </a:p>
         </p:txBody>
@@ -6200,7 +6200,7 @@
                 </a:solidFill>
                 <a:latin typeface="Outfit 1 Light"/>
               </a:rPr>
-              <a:t>O que precisamos construir</a:t>
+              <a:t>O que precisa ser construído</a:t>
             </a:r>
           </a:p>
         </p:txBody>
@@ -9167,7 +9167,7 @@
                 </a:solidFill>
                 <a:latin typeface="Outfit 1 Light"/>
               </a:rPr>
-              <a:t>O que o mercado reconhece e o que precisamos construir.</a:t>
+              <a:t>O que o mercado reconhece e o que precisa ser construído.</a:t>
             </a:r>
           </a:p>
         </p:txBody>
